--- a/slides/decks/s03-haplo-cord-blood.pptx
+++ b/slides/decks/s03-haplo-cord-blood.pptx
@@ -136,25 +136,25 @@
   <p:extLst>
     <p:ext uri="{521415D9-36F7-43E2-AB2F-B90AF26B5E84}">
       <p14:sectionLst xmlns:p14="http://schemas.microsoft.com/office/powerpoint/2010/main">
-        <p14:section name="Opening" id="{3863bc8a-1bfa-686b-4d3b-c8513827a7c2}">
+        <p14:section name="Opening" id="{5be2c128-0d75-eb2a-2ecc-f9bd6d07136f}">
           <p14:sldIdLst>
             <p14:sldId id="256"/>
             <p14:sldId id="257"/>
           </p14:sldIdLst>
         </p14:section>
-        <p14:section name="Alternative donors" id="{553dc7c7-90a7-5a6e-9194-137210283904}">
+        <p14:section name="Alternative donors" id="{019c865b-f50e-41b1-6bec-cab47be2d524}">
           <p14:sldIdLst>
             <p14:sldId id="258"/>
             <p14:sldId id="259"/>
           </p14:sldIdLst>
         </p14:section>
-        <p14:section name="Ex vivo T-cell depletion" id="{84037875-3115-3a5b-6c64-434a7e2b3343}">
+        <p14:section name="Ex vivo T-cell depletion" id="{62cb5fce-8d3a-1e01-13ad-a9af1d79e1be}">
           <p14:sldIdLst>
             <p14:sldId id="260"/>
             <p14:sldId id="261"/>
           </p14:sldIdLst>
         </p14:section>
-        <p14:section name="Unmanipulated haplo" id="{1310b018-7004-b7b3-7e07-7925766488af}">
+        <p14:section name="Unmanipulated haplo" id="{889bb17e-1b45-3978-72e9-cebb1a6e407c}">
           <p14:sldIdLst>
             <p14:sldId id="262"/>
             <p14:sldId id="263"/>
@@ -162,21 +162,21 @@
             <p14:sldId id="265"/>
           </p14:sldIdLst>
         </p14:section>
-        <p14:section name="Haplo choices" id="{dd770275-6b9e-fd85-b285-0f4c2a920636}">
+        <p14:section name="Haplo choices" id="{1d801f86-b5cb-7a4a-6608-ed397c3c901a}">
           <p14:sldIdLst>
             <p14:sldId id="266"/>
             <p14:sldId id="267"/>
             <p14:sldId id="268"/>
           </p14:sldIdLst>
         </p14:section>
-        <p14:section name="Cord blood" id="{497c2a32-c529-d4b2-8335-99d126962426}">
+        <p14:section name="Cord blood" id="{98e32a0f-3935-f0b3-1d1b-d21f3258eef7}">
           <p14:sldIdLst>
             <p14:sldId id="269"/>
             <p14:sldId id="270"/>
             <p14:sldId id="271"/>
           </p14:sldIdLst>
         </p14:section>
-        <p14:section name="Board questions" id="{7bf0f157-fc5d-994a-c53b-686439eb7ead}">
+        <p14:section name="Board questions" id="{4a17075d-2606-4236-aa89-020da5eb421e}">
           <p14:sldIdLst>
             <p14:sldId id="272"/>
             <p14:sldId id="273"/>
@@ -186,7 +186,7 @@
             <p14:sldId id="277"/>
           </p14:sldIdLst>
         </p14:section>
-        <p14:section name="References" id="{2486c543-f178-e14c-558f-510238a84100}">
+        <p14:section name="References" id="{6c467037-f6ed-d8f9-7886-c571b9014422}">
           <p14:sldIdLst>
             <p14:sldId id="278"/>
             <p14:sldId id="279"/>
@@ -194,7 +194,7 @@
             <p14:sldId id="281"/>
           </p14:sldIdLst>
         </p14:section>
-        <p14:section name="Backup" id="{30fede44-35ec-afd6-90e8-ecc1767f46c5}">
+        <p14:section name="Backup" id="{b0c72ac2-6dc9-06fe-c87e-4f96f3e34f07}">
           <p14:sldIdLst>
             <p14:sldId id="282"/>
             <p14:sldId id="283"/>
@@ -8563,7 +8563,21 @@
                   <a:schemeClr val="tx1"/>
                 </a:solidFill>
               </a:rPr>
-              <a:t>Major determinant (Canaani 2018)</a:t>
+              <a:t>Major determinant</a:t>
+            </a:r>
+            <a:endParaRPr lang="en-US" sz="1400" dirty="0"/>
+          </a:p>
+          <a:p>
+            <a:pPr algn="ctr" indent="0" marL="0">
+              <a:buNone/>
+            </a:pPr>
+            <a:r>
+              <a:rPr lang="en-US" sz="1400" dirty="0">
+                <a:solidFill>
+                  <a:schemeClr val="tx1"/>
+                </a:solidFill>
+              </a:rPr>
+              <a:t>(Canaani 2018)</a:t>
             </a:r>
             <a:endParaRPr lang="en-US" sz="1400" dirty="0"/>
           </a:p>
@@ -8733,7 +8747,21 @@
                   <a:schemeClr val="tx1"/>
                 </a:solidFill>
               </a:rPr>
-              <a:t>Confirmed relevant (Wang 2014)</a:t>
+              <a:t>Confirmed</a:t>
+            </a:r>
+            <a:endParaRPr lang="en-US" sz="1400" dirty="0"/>
+          </a:p>
+          <a:p>
+            <a:pPr algn="ctr" indent="0" marL="0">
+              <a:buNone/>
+            </a:pPr>
+            <a:r>
+              <a:rPr lang="en-US" sz="1400" dirty="0">
+                <a:solidFill>
+                  <a:schemeClr val="tx1"/>
+                </a:solidFill>
+              </a:rPr>
+              <a:t>(Wang 2014)</a:t>
             </a:r>
             <a:endParaRPr lang="en-US" sz="1400" dirty="0"/>
           </a:p>
@@ -8903,7 +8931,21 @@
                   <a:schemeClr val="tx1"/>
                 </a:solidFill>
               </a:rPr>
-              <a:t>Suggested (Solomon 2018)</a:t>
+              <a:t>Suggested only</a:t>
+            </a:r>
+            <a:endParaRPr lang="en-US" sz="1400" dirty="0"/>
+          </a:p>
+          <a:p>
+            <a:pPr algn="ctr" indent="0" marL="0">
+              <a:buNone/>
+            </a:pPr>
+            <a:r>
+              <a:rPr lang="en-US" sz="1400" dirty="0">
+                <a:solidFill>
+                  <a:schemeClr val="tx1"/>
+                </a:solidFill>
+              </a:rPr>
+              <a:t>(Solomon 2018)</a:t>
             </a:r>
             <a:endParaRPr lang="en-US" sz="1400" dirty="0"/>
           </a:p>
@@ -9073,7 +9115,21 @@
                   <a:schemeClr val="tx1"/>
                 </a:solidFill>
               </a:rPr>
-              <a:t>No solid data to choose by it</a:t>
+              <a:t>No solid data</a:t>
+            </a:r>
+            <a:endParaRPr lang="en-US" sz="1400" dirty="0"/>
+          </a:p>
+          <a:p>
+            <a:pPr algn="ctr" indent="0" marL="0">
+              <a:buNone/>
+            </a:pPr>
+            <a:r>
+              <a:rPr lang="en-US" sz="1400" dirty="0">
+                <a:solidFill>
+                  <a:schemeClr val="tx1"/>
+                </a:solidFill>
+              </a:rPr>
+              <a:t>to choose by it</a:t>
             </a:r>
             <a:endParaRPr lang="en-US" sz="1400" dirty="0"/>
           </a:p>
@@ -10984,7 +11040,7 @@
         </p:nvSpPr>
         <p:spPr>
           <a:xfrm>
-            <a:off x="685800" y="5120640"/>
+            <a:off x="685800" y="4754880"/>
             <a:ext cx="10817352" cy="411480"/>
           </a:xfrm>
           <a:prstGeom prst="rect">
@@ -11006,7 +11062,7 @@
                   <a:schemeClr val="tx1"/>
                 </a:solidFill>
               </a:rPr>
-              <a:t>Infused TNC 1–2 × 10⁷/kg with low CD34+: marrow and chimerism on days +20–28; no engraftment → second HCT</a:t>
+              <a:t>If infused TNC is 1–2 × 10⁷/kg: chimerism on days +20–28; no engraftment → second HCT</a:t>
             </a:r>
             <a:endParaRPr lang="en-US" sz="1600" dirty="0"/>
           </a:p>
@@ -16945,16 +17001,16 @@
         </p:nvGraphicFramePr>
         <p:xfrm>
           <a:off x="685800" y="2240280"/>
-          <a:ext cx="10817352" cy="914400"/>
+          <a:ext cx="10826496" cy="914400"/>
         </p:xfrm>
         <a:graphic>
           <a:graphicData uri="http://schemas.openxmlformats.org/drawingml/2006/table">
             <a:tbl>
               <a:tblPr/>
               <a:tblGrid>
-                <a:gridCol w="2569464"/>
-                <a:gridCol w="3300984"/>
-                <a:gridCol w="4946904"/>
+                <a:gridCol w="2295144"/>
+                <a:gridCol w="3026664"/>
+                <a:gridCol w="5504688"/>
               </a:tblGrid>
               <a:tr h="0">
                 <a:tc>
@@ -21635,7 +21691,7 @@
                   <a:schemeClr val="tx1"/>
                 </a:solidFill>
               </a:rPr>
-              <a:t>CD45RA+ (naïve T) depletion</a:t>
+              <a:t>CD45RA+ naïve T depletion</a:t>
             </a:r>
             <a:endParaRPr lang="en-US" sz="1500" dirty="0"/>
           </a:p>
@@ -23944,7 +24000,7 @@
         </p:nvSpPr>
         <p:spPr>
           <a:xfrm>
-            <a:off x="685800" y="5486400"/>
+            <a:off x="685800" y="4572000"/>
             <a:ext cx="10817352" cy="411480"/>
           </a:xfrm>
           <a:prstGeom prst="rect">

--- a/slides/decks/s03-haplo-cord-blood.pptx
+++ b/slides/decks/s03-haplo-cord-blood.pptx
@@ -136,25 +136,25 @@
   <p:extLst>
     <p:ext uri="{521415D9-36F7-43E2-AB2F-B90AF26B5E84}">
       <p14:sectionLst xmlns:p14="http://schemas.microsoft.com/office/powerpoint/2010/main">
-        <p14:section name="Opening" id="{5be2c128-0d75-eb2a-2ecc-f9bd6d07136f}">
+        <p14:section name="Opening" id="{e8490a55-ae8f-47e0-b1d8-a7a66ce6d7d9}">
           <p14:sldIdLst>
             <p14:sldId id="256"/>
             <p14:sldId id="257"/>
           </p14:sldIdLst>
         </p14:section>
-        <p14:section name="Alternative donors" id="{019c865b-f50e-41b1-6bec-cab47be2d524}">
+        <p14:section name="Alternative donors" id="{f3b7016f-ab18-60f6-869a-0b36cdc11af5}">
           <p14:sldIdLst>
             <p14:sldId id="258"/>
             <p14:sldId id="259"/>
           </p14:sldIdLst>
         </p14:section>
-        <p14:section name="Ex vivo T-cell depletion" id="{62cb5fce-8d3a-1e01-13ad-a9af1d79e1be}">
+        <p14:section name="Ex vivo T-cell depletion" id="{a8eed541-8304-de9a-5bf7-23d56ab52ceb}">
           <p14:sldIdLst>
             <p14:sldId id="260"/>
             <p14:sldId id="261"/>
           </p14:sldIdLst>
         </p14:section>
-        <p14:section name="Unmanipulated haplo" id="{889bb17e-1b45-3978-72e9-cebb1a6e407c}">
+        <p14:section name="Unmanipulated haplo" id="{7c31ecfd-2f2e-cb8e-2043-48cfbe7d93ba}">
           <p14:sldIdLst>
             <p14:sldId id="262"/>
             <p14:sldId id="263"/>
@@ -162,21 +162,21 @@
             <p14:sldId id="265"/>
           </p14:sldIdLst>
         </p14:section>
-        <p14:section name="Haplo choices" id="{1d801f86-b5cb-7a4a-6608-ed397c3c901a}">
+        <p14:section name="Haplo choices" id="{3c75f7b8-a9c2-9c8f-07ce-51c3ad18c054}">
           <p14:sldIdLst>
             <p14:sldId id="266"/>
             <p14:sldId id="267"/>
             <p14:sldId id="268"/>
           </p14:sldIdLst>
         </p14:section>
-        <p14:section name="Cord blood" id="{98e32a0f-3935-f0b3-1d1b-d21f3258eef7}">
+        <p14:section name="Cord blood" id="{7c2ee0c4-da54-03ec-aa52-0c2e61cf0eb6}">
           <p14:sldIdLst>
             <p14:sldId id="269"/>
             <p14:sldId id="270"/>
             <p14:sldId id="271"/>
           </p14:sldIdLst>
         </p14:section>
-        <p14:section name="Board questions" id="{4a17075d-2606-4236-aa89-020da5eb421e}">
+        <p14:section name="Board questions" id="{d641bae4-3d9f-d063-a12d-5a6a99eb8c76}">
           <p14:sldIdLst>
             <p14:sldId id="272"/>
             <p14:sldId id="273"/>
@@ -186,7 +186,7 @@
             <p14:sldId id="277"/>
           </p14:sldIdLst>
         </p14:section>
-        <p14:section name="References" id="{6c467037-f6ed-d8f9-7886-c571b9014422}">
+        <p14:section name="References" id="{f56c79ea-338f-8525-71ea-ae8100a51146}">
           <p14:sldIdLst>
             <p14:sldId id="278"/>
             <p14:sldId id="279"/>
@@ -194,7 +194,7 @@
             <p14:sldId id="281"/>
           </p14:sldIdLst>
         </p14:section>
-        <p14:section name="Backup" id="{b0c72ac2-6dc9-06fe-c87e-4f96f3e34f07}">
+        <p14:section name="Backup" id="{f5a8e039-293b-2d59-26e8-22a6cdd9fec4}">
           <p14:sldIdLst>
             <p14:sldId id="282"/>
             <p14:sldId id="283"/>

--- a/slides/decks/s03-haplo-cord-blood.pptx
+++ b/slides/decks/s03-haplo-cord-blood.pptx
@@ -136,25 +136,25 @@
   <p:extLst>
     <p:ext uri="{521415D9-36F7-43E2-AB2F-B90AF26B5E84}">
       <p14:sectionLst xmlns:p14="http://schemas.microsoft.com/office/powerpoint/2010/main">
-        <p14:section name="Opening" id="{e8490a55-ae8f-47e0-b1d8-a7a66ce6d7d9}">
+        <p14:section name="Opening" id="{7b3d649f-3a90-ce9c-0e42-a6e6c3868042}">
           <p14:sldIdLst>
             <p14:sldId id="256"/>
             <p14:sldId id="257"/>
           </p14:sldIdLst>
         </p14:section>
-        <p14:section name="Alternative donors" id="{f3b7016f-ab18-60f6-869a-0b36cdc11af5}">
+        <p14:section name="Alternative donors" id="{1d93a965-4b3b-c681-4450-b469b2252e57}">
           <p14:sldIdLst>
             <p14:sldId id="258"/>
             <p14:sldId id="259"/>
           </p14:sldIdLst>
         </p14:section>
-        <p14:section name="Ex vivo T-cell depletion" id="{a8eed541-8304-de9a-5bf7-23d56ab52ceb}">
+        <p14:section name="Ex vivo T-cell depletion" id="{03e3bbf3-280d-8a7d-e0e7-952aea22da87}">
           <p14:sldIdLst>
             <p14:sldId id="260"/>
             <p14:sldId id="261"/>
           </p14:sldIdLst>
         </p14:section>
-        <p14:section name="Unmanipulated haplo" id="{7c31ecfd-2f2e-cb8e-2043-48cfbe7d93ba}">
+        <p14:section name="Unmanipulated haplo" id="{16f3dadd-f2d2-5fae-890c-765758a01d70}">
           <p14:sldIdLst>
             <p14:sldId id="262"/>
             <p14:sldId id="263"/>
@@ -162,21 +162,21 @@
             <p14:sldId id="265"/>
           </p14:sldIdLst>
         </p14:section>
-        <p14:section name="Haplo choices" id="{3c75f7b8-a9c2-9c8f-07ce-51c3ad18c054}">
+        <p14:section name="Haplo choices" id="{7e3c2100-278c-89a7-c0bc-b6fc86f16566}">
           <p14:sldIdLst>
             <p14:sldId id="266"/>
             <p14:sldId id="267"/>
             <p14:sldId id="268"/>
           </p14:sldIdLst>
         </p14:section>
-        <p14:section name="Cord blood" id="{7c2ee0c4-da54-03ec-aa52-0c2e61cf0eb6}">
+        <p14:section name="Cord blood" id="{1e22e402-0e8f-ca86-c867-fc6d49c07506}">
           <p14:sldIdLst>
             <p14:sldId id="269"/>
             <p14:sldId id="270"/>
             <p14:sldId id="271"/>
           </p14:sldIdLst>
         </p14:section>
-        <p14:section name="Board questions" id="{d641bae4-3d9f-d063-a12d-5a6a99eb8c76}">
+        <p14:section name="Board questions" id="{fa7fc7b4-ca59-9439-f45f-c66cf7590330}">
           <p14:sldIdLst>
             <p14:sldId id="272"/>
             <p14:sldId id="273"/>
@@ -186,7 +186,7 @@
             <p14:sldId id="277"/>
           </p14:sldIdLst>
         </p14:section>
-        <p14:section name="References" id="{f56c79ea-338f-8525-71ea-ae8100a51146}">
+        <p14:section name="References" id="{e05243e2-755e-dced-04ae-2b6594c3f672}">
           <p14:sldIdLst>
             <p14:sldId id="278"/>
             <p14:sldId id="279"/>
@@ -194,7 +194,7 @@
             <p14:sldId id="281"/>
           </p14:sldIdLst>
         </p14:section>
-        <p14:section name="Backup" id="{f5a8e039-293b-2d59-26e8-22a6cdd9fec4}">
+        <p14:section name="Backup" id="{29bec3b7-0dd4-4d08-cf18-ef7c618e2ea1}">
           <p14:sldIdLst>
             <p14:sldId id="282"/>
             <p14:sldId id="283"/>
@@ -622,7 +622,7 @@
             </a:pPr>
             <a:r>
               <a:rPr lang="en-US" dirty="0"/>
-              <a:t>各位好，第三週談 alternative donor，就是沒有 matched sibling、也沒有 matched unrelated donor 時的選擇。核心是 Handbook 第 65 章 haplo 和第 64 章 cord blood，再加第 18 章挑 cord unit 的標準，最後三題考題。</a:t>
+              <a:t>各位好，第 3 堂談 alternative donor，就是沒有 matched sibling、也沒有 matched unrelated donor 時的選擇。核心是 Handbook 第 65 章 haplo 和第 64 章 cord blood，再加第 18 章挑 cord unit 的標準，最後三題考題。</a:t>
             </a:r>
           </a:p>
           <a:p>
@@ -5412,7 +5412,7 @@
                   <a:schemeClr val="tx1"/>
                 </a:solidFill>
               </a:rPr>
-              <a:t>Week 3 · Ch. 65, 64, 18</a:t>
+              <a:t>Session 03 · Ch. 65, 64, 18</a:t>
             </a:r>
             <a:endParaRPr lang="en-US" sz="2000" dirty="0"/>
           </a:p>

--- a/slides/decks/s03-haplo-cord-blood.pptx
+++ b/slides/decks/s03-haplo-cord-blood.pptx
@@ -136,25 +136,25 @@
   <p:extLst>
     <p:ext uri="{521415D9-36F7-43E2-AB2F-B90AF26B5E84}">
       <p14:sectionLst xmlns:p14="http://schemas.microsoft.com/office/powerpoint/2010/main">
-        <p14:section name="Opening" id="{7b3d649f-3a90-ce9c-0e42-a6e6c3868042}">
+        <p14:section name="Opening" id="{1acf8bb6-5a6a-c7b2-327d-ae7ca9f3d35a}">
           <p14:sldIdLst>
             <p14:sldId id="256"/>
             <p14:sldId id="257"/>
           </p14:sldIdLst>
         </p14:section>
-        <p14:section name="Alternative donors" id="{1d93a965-4b3b-c681-4450-b469b2252e57}">
+        <p14:section name="Alternative donors" id="{a52b42e1-3275-aff2-9654-7634a93b5a85}">
           <p14:sldIdLst>
             <p14:sldId id="258"/>
             <p14:sldId id="259"/>
           </p14:sldIdLst>
         </p14:section>
-        <p14:section name="Ex vivo T-cell depletion" id="{03e3bbf3-280d-8a7d-e0e7-952aea22da87}">
+        <p14:section name="Ex vivo T-cell depletion" id="{1999aa79-c967-4d2c-2b81-fe40451ff586}">
           <p14:sldIdLst>
             <p14:sldId id="260"/>
             <p14:sldId id="261"/>
           </p14:sldIdLst>
         </p14:section>
-        <p14:section name="Unmanipulated haplo" id="{16f3dadd-f2d2-5fae-890c-765758a01d70}">
+        <p14:section name="Unmanipulated haplo" id="{7e3c98d7-e1bf-e504-a062-7a2da556f90a}">
           <p14:sldIdLst>
             <p14:sldId id="262"/>
             <p14:sldId id="263"/>
@@ -162,21 +162,21 @@
             <p14:sldId id="265"/>
           </p14:sldIdLst>
         </p14:section>
-        <p14:section name="Haplo choices" id="{7e3c2100-278c-89a7-c0bc-b6fc86f16566}">
+        <p14:section name="Haplo choices" id="{b14f8f82-e81e-c15e-c445-94f05f2b949a}">
           <p14:sldIdLst>
             <p14:sldId id="266"/>
             <p14:sldId id="267"/>
             <p14:sldId id="268"/>
           </p14:sldIdLst>
         </p14:section>
-        <p14:section name="Cord blood" id="{1e22e402-0e8f-ca86-c867-fc6d49c07506}">
+        <p14:section name="Cord blood" id="{fbdf6902-4ecd-6ff5-ae96-a66f11db75eb}">
           <p14:sldIdLst>
             <p14:sldId id="269"/>
             <p14:sldId id="270"/>
             <p14:sldId id="271"/>
           </p14:sldIdLst>
         </p14:section>
-        <p14:section name="Board questions" id="{fa7fc7b4-ca59-9439-f45f-c66cf7590330}">
+        <p14:section name="Board questions" id="{1fb4db32-a8b6-c453-b59c-0e1a8e6a193c}">
           <p14:sldIdLst>
             <p14:sldId id="272"/>
             <p14:sldId id="273"/>
@@ -186,7 +186,7 @@
             <p14:sldId id="277"/>
           </p14:sldIdLst>
         </p14:section>
-        <p14:section name="References" id="{e05243e2-755e-dced-04ae-2b6594c3f672}">
+        <p14:section name="References" id="{f074b970-f165-6d60-9511-58dc1291e7dd}">
           <p14:sldIdLst>
             <p14:sldId id="278"/>
             <p14:sldId id="279"/>
@@ -194,7 +194,7 @@
             <p14:sldId id="281"/>
           </p14:sldIdLst>
         </p14:section>
-        <p14:section name="Backup" id="{29bec3b7-0dd4-4d08-cf18-ef7c618e2ea1}">
+        <p14:section name="Backup" id="{80fe2480-97fd-92de-93d7-e6fded2403ad}">
           <p14:sldIdLst>
             <p14:sldId id="282"/>
             <p14:sldId id="283"/>
